--- a/public/fun/cards/public/public-27.pptx
+++ b/public/fun/cards/public/public-27.pptx
@@ -3085,7 +3085,7 @@
     <p:bg>
       <p:bgPr>
         <a:solidFill>
-          <a:srgbClr val="FBF8F2"/>
+          <a:srgbClr val="FFFCE6"/>
         </a:solidFill>
         <a:effectLst/>
       </p:bgPr>
@@ -3099,23 +3099,23 @@
       <p:grpSpPr/>
       <p:sp>
         <p:nvSpPr>
-          <p:cNvPr id="2" name="Rectangle 1"/>
+          <p:cNvPr id="2" name="Oval 1"/>
           <p:cNvSpPr/>
           <p:nvPr/>
         </p:nvSpPr>
         <p:spPr>
           <a:xfrm>
-            <a:off x="93600" y="93600"/>
-            <a:ext cx="3052800" cy="1612800"/>
+            <a:off x="1591200" y="208800"/>
+            <a:ext cx="57600" cy="57600"/>
           </a:xfrm>
-          <a:prstGeom prst="rect">
+          <a:prstGeom prst="ellipse">
             <a:avLst/>
           </a:prstGeom>
-          <a:noFill/>
-          <a:ln w="10800">
-            <a:solidFill>
-              <a:srgbClr val="475285"/>
-            </a:solidFill>
+          <a:solidFill>
+            <a:srgbClr val="FFE600"/>
+          </a:solidFill>
+          <a:ln>
+            <a:noFill/>
           </a:ln>
         </p:spPr>
         <p:txBody>
@@ -3128,43 +3128,14 @@
       </p:sp>
       <p:sp>
         <p:nvSpPr>
-          <p:cNvPr id="3" name="Rectangle 2"/>
-          <p:cNvSpPr/>
+          <p:cNvPr id="3" name="텍스트"/>
+          <p:cNvSpPr txBox="1"/>
           <p:nvPr/>
         </p:nvSpPr>
         <p:spPr>
           <a:xfrm>
-            <a:off x="144000" y="144000"/>
-            <a:ext cx="2952000" cy="1512000"/>
-          </a:xfrm>
-          <a:prstGeom prst="rect">
-            <a:avLst/>
-          </a:prstGeom>
-          <a:noFill/>
-          <a:ln w="5400">
-            <a:solidFill>
-              <a:srgbClr val="CBCFDD"/>
-            </a:solidFill>
-          </a:ln>
-        </p:spPr>
-        <p:txBody>
-          <a:bodyPr rtlCol="0" anchor="ctr"/>
-          <a:lstStyle/>
-          <a:p>
-            <a:pPr algn="ctr"/>
-          </a:p>
-        </p:txBody>
-      </p:sp>
-      <p:sp>
-        <p:nvSpPr>
-          <p:cNvPr id="4" name="텍스트"/>
-          <p:cNvSpPr txBox="1"/>
-          <p:nvPr/>
-        </p:nvSpPr>
-        <p:spPr>
-          <a:xfrm>
-            <a:off x="360000" y="280800"/>
-            <a:ext cx="2520000" cy="100800"/>
+            <a:off x="360000" y="468000"/>
+            <a:ext cx="2520000" cy="360000"/>
           </a:xfrm>
           <a:prstGeom prst="rect">
             <a:avLst/>
@@ -3179,32 +3150,32 @@
           <a:p>
             <a:pPr algn="ctr">
               <a:lnSpc>
-                <a:spcPts val="1015"/>
+                <a:spcPts val="3190"/>
               </a:lnSpc>
             </a:pPr>
             <a:r>
-              <a:rPr sz="700" b="1" spc="400">
+              <a:rPr sz="2200" b="1">
                 <a:solidFill>
-                  <a:srgbClr val="6C725C"/>
+                  <a:srgbClr val="12151C"/>
                 </a:solidFill>
                 <a:latin typeface="맑은 고딕"/>
                 <a:ea typeface="맑은 고딕"/>
               </a:rPr>
-              <a:t>기관명 · 부서명</a:t>
-            </a:r>
-          </a:p>
-        </p:txBody>
-      </p:sp>
-      <p:sp>
-        <p:nvSpPr>
-          <p:cNvPr id="5" name="텍스트"/>
+              <a:t>하지안</a:t>
+            </a:r>
+          </a:p>
+        </p:txBody>
+      </p:sp>
+      <p:sp>
+        <p:nvSpPr>
+          <p:cNvPr id="4" name="텍스트"/>
           <p:cNvSpPr txBox="1"/>
           <p:nvPr/>
         </p:nvSpPr>
         <p:spPr>
           <a:xfrm>
-            <a:off x="360000" y="468000"/>
-            <a:ext cx="2520000" cy="313692"/>
+            <a:off x="360000" y="878400"/>
+            <a:ext cx="2520000" cy="171451"/>
           </a:xfrm>
           <a:prstGeom prst="rect">
             <a:avLst/>
@@ -3219,19 +3190,48 @@
           <a:p>
             <a:pPr algn="ctr">
               <a:lnSpc>
-                <a:spcPts val="2755"/>
+                <a:spcPts val="1305"/>
               </a:lnSpc>
             </a:pPr>
             <a:r>
-              <a:rPr sz="1900" b="1" spc="50">
+              <a:rPr sz="900" b="0">
                 <a:solidFill>
-                  <a:srgbClr val="49562E"/>
+                  <a:srgbClr val="6C6411"/>
                 </a:solidFill>
                 <a:latin typeface="맑은 고딕"/>
                 <a:ea typeface="맑은 고딕"/>
               </a:rPr>
-              <a:t>하지안</a:t>
-            </a:r>
+              <a:t>행정주사</a:t>
+            </a:r>
+          </a:p>
+        </p:txBody>
+      </p:sp>
+      <p:sp>
+        <p:nvSpPr>
+          <p:cNvPr id="5" name="Rectangle 4"/>
+          <p:cNvSpPr/>
+          <p:nvPr/>
+        </p:nvSpPr>
+        <p:spPr>
+          <a:xfrm>
+            <a:off x="1530000" y="1137600"/>
+            <a:ext cx="180000" cy="14400"/>
+          </a:xfrm>
+          <a:prstGeom prst="rect">
+            <a:avLst/>
+          </a:prstGeom>
+          <a:solidFill>
+            <a:srgbClr val="FFE600"/>
+          </a:solidFill>
+          <a:ln>
+            <a:noFill/>
+          </a:ln>
+        </p:spPr>
+        <p:txBody>
+          <a:bodyPr rtlCol="0" anchor="ctr"/>
+          <a:lstStyle/>
+          <a:p>
+            <a:pPr algn="ctr"/>
           </a:p>
         </p:txBody>
       </p:sp>
@@ -3243,8 +3243,8 @@
         </p:nvSpPr>
         <p:spPr>
           <a:xfrm>
-            <a:off x="360000" y="784800"/>
-            <a:ext cx="2520000" cy="122400"/>
+            <a:off x="360000" y="1267200"/>
+            <a:ext cx="2520000" cy="133351"/>
           </a:xfrm>
           <a:prstGeom prst="rect">
             <a:avLst/>
@@ -3259,61 +3259,32 @@
           <a:p>
             <a:pPr algn="ctr">
               <a:lnSpc>
-                <a:spcPts val="1232"/>
+                <a:spcPts val="1015"/>
               </a:lnSpc>
             </a:pPr>
             <a:r>
-              <a:rPr sz="850" b="1">
+              <a:rPr sz="700" b="0">
                 <a:solidFill>
-                  <a:srgbClr val="475285"/>
+                  <a:srgbClr val="12151C"/>
                 </a:solidFill>
                 <a:latin typeface="맑은 고딕"/>
                 <a:ea typeface="맑은 고딕"/>
               </a:rPr>
-              <a:t>행정주사</a:t>
-            </a:r>
-          </a:p>
-        </p:txBody>
-      </p:sp>
-      <p:sp>
-        <p:nvSpPr>
-          <p:cNvPr id="7" name="Rectangle 6"/>
-          <p:cNvSpPr/>
+              <a:t>010-1234-5678      name@example.com</a:t>
+            </a:r>
+          </a:p>
+        </p:txBody>
+      </p:sp>
+      <p:sp>
+        <p:nvSpPr>
+          <p:cNvPr id="7" name="텍스트"/>
+          <p:cNvSpPr txBox="1"/>
           <p:nvPr/>
         </p:nvSpPr>
         <p:spPr>
           <a:xfrm>
-            <a:off x="1530000" y="993600"/>
-            <a:ext cx="180000" cy="10800"/>
-          </a:xfrm>
-          <a:prstGeom prst="rect">
-            <a:avLst/>
-          </a:prstGeom>
-          <a:solidFill>
-            <a:srgbClr val="475285"/>
-          </a:solidFill>
-          <a:ln>
-            <a:noFill/>
-          </a:ln>
-        </p:spPr>
-        <p:txBody>
-          <a:bodyPr rtlCol="0" anchor="ctr"/>
-          <a:lstStyle/>
-          <a:p>
-            <a:pPr algn="ctr"/>
-          </a:p>
-        </p:txBody>
-      </p:sp>
-      <p:sp>
-        <p:nvSpPr>
-          <p:cNvPr id="8" name="텍스트"/>
-          <p:cNvSpPr txBox="1"/>
-          <p:nvPr/>
-        </p:nvSpPr>
-        <p:spPr>
-          <a:xfrm>
-            <a:off x="360000" y="1087200"/>
-            <a:ext cx="2520000" cy="108000"/>
+            <a:off x="360000" y="1425600"/>
+            <a:ext cx="2520000" cy="133351"/>
           </a:xfrm>
           <a:prstGeom prst="rect">
             <a:avLst/>
@@ -3328,32 +3299,32 @@
           <a:p>
             <a:pPr algn="ctr">
               <a:lnSpc>
-                <a:spcPts val="1087"/>
+                <a:spcPts val="1015"/>
               </a:lnSpc>
             </a:pPr>
             <a:r>
-              <a:rPr sz="750" b="0">
+              <a:rPr sz="700" b="0">
                 <a:solidFill>
-                  <a:srgbClr val="49562E"/>
+                  <a:srgbClr val="6C6411"/>
                 </a:solidFill>
                 <a:latin typeface="맑은 고딕"/>
                 <a:ea typeface="맑은 고딕"/>
               </a:rPr>
-              <a:t>010-1234-5678</a:t>
-            </a:r>
-          </a:p>
-        </p:txBody>
-      </p:sp>
-      <p:sp>
-        <p:nvSpPr>
-          <p:cNvPr id="9" name="텍스트"/>
+              <a:t>주소를 입력해 주세요</a:t>
+            </a:r>
+          </a:p>
+        </p:txBody>
+      </p:sp>
+      <p:sp>
+        <p:nvSpPr>
+          <p:cNvPr id="8" name="텍스트"/>
           <p:cNvSpPr txBox="1"/>
           <p:nvPr/>
         </p:nvSpPr>
         <p:spPr>
           <a:xfrm>
-            <a:off x="360000" y="1209600"/>
-            <a:ext cx="2520000" cy="108000"/>
+            <a:off x="360000" y="1576800"/>
+            <a:ext cx="2520000" cy="104776"/>
           </a:xfrm>
           <a:prstGeom prst="rect">
             <a:avLst/>
@@ -3368,159 +3339,19 @@
           <a:p>
             <a:pPr algn="ctr">
               <a:lnSpc>
-                <a:spcPts val="1087"/>
+                <a:spcPts val="797"/>
               </a:lnSpc>
             </a:pPr>
             <a:r>
-              <a:rPr sz="750" b="0">
+              <a:rPr sz="550" b="1" spc="300">
                 <a:solidFill>
-                  <a:srgbClr val="49562E"/>
+                  <a:srgbClr val="6C6411"/>
                 </a:solidFill>
                 <a:latin typeface="맑은 고딕"/>
                 <a:ea typeface="맑은 고딕"/>
               </a:rPr>
-              <a:t>name@example.com</a:t>
-            </a:r>
-          </a:p>
-        </p:txBody>
-      </p:sp>
-      <p:sp>
-        <p:nvSpPr>
-          <p:cNvPr id="10" name="텍스트"/>
-          <p:cNvSpPr txBox="1"/>
-          <p:nvPr/>
-        </p:nvSpPr>
-        <p:spPr>
-          <a:xfrm>
-            <a:off x="360000" y="1332000"/>
-            <a:ext cx="2520000" cy="108000"/>
-          </a:xfrm>
-          <a:prstGeom prst="rect">
-            <a:avLst/>
-          </a:prstGeom>
-          <a:noFill/>
-        </p:spPr>
-        <p:txBody>
-          <a:bodyPr wrap="square" lIns="0" rIns="0" tIns="0" bIns="0" anchor="t">
-            <a:spAutoFit/>
-          </a:bodyPr>
-          <a:lstStyle/>
-          <a:p>
-            <a:pPr algn="ctr">
-              <a:lnSpc>
-                <a:spcPts val="1015"/>
-              </a:lnSpc>
-            </a:pPr>
-            <a:r>
-              <a:rPr sz="700" b="0">
-                <a:solidFill>
-                  <a:srgbClr val="6C725C"/>
-                </a:solidFill>
-                <a:latin typeface="맑은 고딕"/>
-                <a:ea typeface="맑은 고딕"/>
-              </a:rPr>
-              <a:t>주소를 입력해 주세요</a:t>
-            </a:r>
-          </a:p>
-        </p:txBody>
-      </p:sp>
-      <p:sp>
-        <p:nvSpPr>
-          <p:cNvPr id="11" name="Freeform 10"/>
-          <p:cNvSpPr/>
-          <p:nvPr/>
-        </p:nvSpPr>
-        <p:spPr>
-          <a:xfrm>
-            <a:off x="1557072" y="1509696"/>
-            <a:ext cx="60192" cy="87552"/>
-          </a:xfrm>
-          <a:custGeom>
-            <a:avLst/>
-            <a:gdLst/>
-            <a:ahLst/>
-            <a:cxnLst/>
-            <a:rect l="l" t="t" r="r" b="b"/>
-            <a:pathLst>
-              <a:path w="60192" h="87552">
-                <a:moveTo>
-                  <a:pt x="0" y="0"/>
-                </a:moveTo>
-                <a:lnTo>
-                  <a:pt x="60192" y="10944"/>
-                </a:lnTo>
-                <a:lnTo>
-                  <a:pt x="60192" y="87552"/>
-                </a:lnTo>
-                <a:lnTo>
-                  <a:pt x="0" y="76608"/>
-                </a:lnTo>
-                <a:close/>
-              </a:path>
-            </a:pathLst>
-          </a:custGeom>
-          <a:solidFill>
-            <a:srgbClr val="475285"/>
-          </a:solidFill>
-          <a:ln>
-            <a:noFill/>
-          </a:ln>
-        </p:spPr>
-        <p:txBody>
-          <a:bodyPr rtlCol="0" anchor="ctr"/>
-          <a:lstStyle/>
-          <a:p>
-            <a:pPr algn="ctr"/>
-          </a:p>
-        </p:txBody>
-      </p:sp>
-      <p:sp>
-        <p:nvSpPr>
-          <p:cNvPr id="12" name="Freeform 11"/>
-          <p:cNvSpPr/>
-          <p:nvPr/>
-        </p:nvSpPr>
-        <p:spPr>
-          <a:xfrm>
-            <a:off x="1622736" y="1509696"/>
-            <a:ext cx="60192" cy="87552"/>
-          </a:xfrm>
-          <a:custGeom>
-            <a:avLst/>
-            <a:gdLst/>
-            <a:ahLst/>
-            <a:cxnLst/>
-            <a:rect l="l" t="t" r="r" b="b"/>
-            <a:pathLst>
-              <a:path w="60192" h="87552">
-                <a:moveTo>
-                  <a:pt x="60192" y="0"/>
-                </a:moveTo>
-                <a:lnTo>
-                  <a:pt x="0" y="10944"/>
-                </a:lnTo>
-                <a:lnTo>
-                  <a:pt x="0" y="87552"/>
-                </a:lnTo>
-                <a:lnTo>
-                  <a:pt x="60192" y="76608"/>
-                </a:lnTo>
-                <a:close/>
-              </a:path>
-            </a:pathLst>
-          </a:custGeom>
-          <a:solidFill>
-            <a:srgbClr val="CBCFDD"/>
-          </a:solidFill>
-          <a:ln>
-            <a:noFill/>
-          </a:ln>
-        </p:spPr>
-        <p:txBody>
-          <a:bodyPr rtlCol="0" anchor="ctr"/>
-          <a:lstStyle/>
-          <a:p>
-            <a:pPr algn="ctr"/>
+              <a:t>기관명 · 부서명</a:t>
+            </a:r>
           </a:p>
         </p:txBody>
       </p:sp>
@@ -3538,7 +3369,7 @@
     <p:bg>
       <p:bgPr>
         <a:solidFill>
-          <a:srgbClr val="FFFFFF"/>
+          <a:srgbClr val="F3F4F6"/>
         </a:solidFill>
         <a:effectLst/>
       </p:bgPr>
@@ -3552,43 +3383,14 @@
       <p:grpSpPr/>
       <p:sp>
         <p:nvSpPr>
-          <p:cNvPr id="2" name="Rectangle 1"/>
+          <p:cNvPr id="2" name="Freeform 1"/>
           <p:cNvSpPr/>
           <p:nvPr/>
         </p:nvSpPr>
         <p:spPr>
           <a:xfrm>
             <a:off x="0" y="0"/>
-            <a:ext cx="273600" cy="1800000"/>
-          </a:xfrm>
-          <a:prstGeom prst="rect">
-            <a:avLst/>
-          </a:prstGeom>
-          <a:solidFill>
-            <a:srgbClr val="2B8245"/>
-          </a:solidFill>
-          <a:ln>
-            <a:noFill/>
-          </a:ln>
-        </p:spPr>
-        <p:txBody>
-          <a:bodyPr rtlCol="0" anchor="ctr"/>
-          <a:lstStyle/>
-          <a:p>
-            <a:pPr algn="ctr"/>
-          </a:p>
-        </p:txBody>
-      </p:sp>
-      <p:sp>
-        <p:nvSpPr>
-          <p:cNvPr id="3" name="Freeform 2"/>
-          <p:cNvSpPr/>
-          <p:nvPr/>
-        </p:nvSpPr>
-        <p:spPr>
-          <a:xfrm>
-            <a:off x="63936" y="193248"/>
-            <a:ext cx="69696" cy="101376"/>
+            <a:ext cx="1080000" cy="1080000"/>
           </a:xfrm>
           <a:custGeom>
             <a:avLst/>
@@ -3597,25 +3399,91 @@
             <a:cxnLst/>
             <a:rect l="l" t="t" r="r" b="b"/>
             <a:pathLst>
-              <a:path w="69696" h="101376">
+              <a:path w="1080000" h="1080000">
                 <a:moveTo>
                   <a:pt x="0" y="0"/>
                 </a:moveTo>
                 <a:lnTo>
-                  <a:pt x="69696" y="12672"/>
-                </a:lnTo>
-                <a:lnTo>
-                  <a:pt x="69696" y="101376"/>
-                </a:lnTo>
-                <a:lnTo>
-                  <a:pt x="0" y="88704"/>
+                  <a:pt x="1080000" y="0"/>
+                </a:lnTo>
+                <a:lnTo>
+                  <a:pt x="1077688" y="70635"/>
+                </a:lnTo>
+                <a:lnTo>
+                  <a:pt x="1070760" y="140968"/>
+                </a:lnTo>
+                <a:lnTo>
+                  <a:pt x="1059248" y="210698"/>
+                </a:lnTo>
+                <a:lnTo>
+                  <a:pt x="1043200" y="279525"/>
+                </a:lnTo>
+                <a:lnTo>
+                  <a:pt x="1022685" y="347155"/>
+                </a:lnTo>
+                <a:lnTo>
+                  <a:pt x="997790" y="413298"/>
+                </a:lnTo>
+                <a:lnTo>
+                  <a:pt x="968623" y="477672"/>
+                </a:lnTo>
+                <a:lnTo>
+                  <a:pt x="935307" y="540000"/>
+                </a:lnTo>
+                <a:lnTo>
+                  <a:pt x="897987" y="600016"/>
+                </a:lnTo>
+                <a:lnTo>
+                  <a:pt x="856822" y="657462"/>
+                </a:lnTo>
+                <a:lnTo>
+                  <a:pt x="811987" y="712093"/>
+                </a:lnTo>
+                <a:lnTo>
+                  <a:pt x="763675" y="763675"/>
+                </a:lnTo>
+                <a:lnTo>
+                  <a:pt x="712093" y="811987"/>
+                </a:lnTo>
+                <a:lnTo>
+                  <a:pt x="657462" y="856822"/>
+                </a:lnTo>
+                <a:lnTo>
+                  <a:pt x="600016" y="897987"/>
+                </a:lnTo>
+                <a:lnTo>
+                  <a:pt x="540000" y="935307"/>
+                </a:lnTo>
+                <a:lnTo>
+                  <a:pt x="477672" y="968623"/>
+                </a:lnTo>
+                <a:lnTo>
+                  <a:pt x="413298" y="997790"/>
+                </a:lnTo>
+                <a:lnTo>
+                  <a:pt x="347155" y="1022685"/>
+                </a:lnTo>
+                <a:lnTo>
+                  <a:pt x="279525" y="1043200"/>
+                </a:lnTo>
+                <a:lnTo>
+                  <a:pt x="210698" y="1059248"/>
+                </a:lnTo>
+                <a:lnTo>
+                  <a:pt x="140968" y="1070760"/>
+                </a:lnTo>
+                <a:lnTo>
+                  <a:pt x="70635" y="1077688"/>
+                </a:lnTo>
+                <a:lnTo>
+                  <a:pt x="0" y="1080000"/>
                 </a:lnTo>
                 <a:close/>
               </a:path>
             </a:pathLst>
           </a:custGeom>
           <a:solidFill>
-            <a:srgbClr val="FFFFFF"/>
+            <a:srgbClr val="FFE600"/>
           </a:solidFill>
           <a:ln>
             <a:noFill/>
@@ -3631,14 +3499,14 @@
       </p:sp>
       <p:sp>
         <p:nvSpPr>
-          <p:cNvPr id="4" name="Freeform 3"/>
+          <p:cNvPr id="3" name="Freeform 2"/>
           <p:cNvSpPr/>
           <p:nvPr/>
         </p:nvSpPr>
         <p:spPr>
           <a:xfrm>
-            <a:off x="139968" y="193248"/>
-            <a:ext cx="69696" cy="101376"/>
+            <a:off x="0" y="0"/>
+            <a:ext cx="684000" cy="684000"/>
           </a:xfrm>
           <a:custGeom>
             <a:avLst/>
@@ -3647,25 +3515,91 @@
             <a:cxnLst/>
             <a:rect l="l" t="t" r="r" b="b"/>
             <a:pathLst>
-              <a:path w="69696" h="101376">
+              <a:path w="684000" h="684000">
                 <a:moveTo>
-                  <a:pt x="69696" y="0"/>
+                  <a:pt x="0" y="0"/>
                 </a:moveTo>
                 <a:lnTo>
-                  <a:pt x="0" y="12672"/>
-                </a:lnTo>
-                <a:lnTo>
-                  <a:pt x="0" y="101376"/>
-                </a:lnTo>
-                <a:lnTo>
-                  <a:pt x="69696" y="88704"/>
+                  <a:pt x="684000" y="0"/>
+                </a:lnTo>
+                <a:lnTo>
+                  <a:pt x="682536" y="44736"/>
+                </a:lnTo>
+                <a:lnTo>
+                  <a:pt x="678148" y="89280"/>
+                </a:lnTo>
+                <a:lnTo>
+                  <a:pt x="670857" y="133442"/>
+                </a:lnTo>
+                <a:lnTo>
+                  <a:pt x="660693" y="177032"/>
+                </a:lnTo>
+                <a:lnTo>
+                  <a:pt x="647700" y="219865"/>
+                </a:lnTo>
+                <a:lnTo>
+                  <a:pt x="631934" y="261755"/>
+                </a:lnTo>
+                <a:lnTo>
+                  <a:pt x="613461" y="302525"/>
+                </a:lnTo>
+                <a:lnTo>
+                  <a:pt x="592361" y="342000"/>
+                </a:lnTo>
+                <a:lnTo>
+                  <a:pt x="568725" y="380010"/>
+                </a:lnTo>
+                <a:lnTo>
+                  <a:pt x="542654" y="416393"/>
+                </a:lnTo>
+                <a:lnTo>
+                  <a:pt x="514258" y="450993"/>
+                </a:lnTo>
+                <a:lnTo>
+                  <a:pt x="483661" y="483661"/>
+                </a:lnTo>
+                <a:lnTo>
+                  <a:pt x="450993" y="514258"/>
+                </a:lnTo>
+                <a:lnTo>
+                  <a:pt x="416393" y="542654"/>
+                </a:lnTo>
+                <a:lnTo>
+                  <a:pt x="380010" y="568725"/>
+                </a:lnTo>
+                <a:lnTo>
+                  <a:pt x="342000" y="592361"/>
+                </a:lnTo>
+                <a:lnTo>
+                  <a:pt x="302525" y="613461"/>
+                </a:lnTo>
+                <a:lnTo>
+                  <a:pt x="261755" y="631934"/>
+                </a:lnTo>
+                <a:lnTo>
+                  <a:pt x="219865" y="647700"/>
+                </a:lnTo>
+                <a:lnTo>
+                  <a:pt x="177032" y="660693"/>
+                </a:lnTo>
+                <a:lnTo>
+                  <a:pt x="133442" y="670857"/>
+                </a:lnTo>
+                <a:lnTo>
+                  <a:pt x="89280" y="678148"/>
+                </a:lnTo>
+                <a:lnTo>
+                  <a:pt x="44736" y="682536"/>
+                </a:lnTo>
+                <a:lnTo>
+                  <a:pt x="0" y="684000"/>
                 </a:lnTo>
                 <a:close/>
               </a:path>
             </a:pathLst>
           </a:custGeom>
           <a:solidFill>
-            <a:srgbClr val="808080"/>
+            <a:srgbClr val="F5F2D4"/>
           </a:solidFill>
           <a:ln>
             <a:noFill/>
@@ -3681,14 +3615,14 @@
       </p:sp>
       <p:sp>
         <p:nvSpPr>
-          <p:cNvPr id="5" name="텍스트"/>
+          <p:cNvPr id="4" name="텍스트"/>
           <p:cNvSpPr txBox="1"/>
           <p:nvPr/>
         </p:nvSpPr>
         <p:spPr>
           <a:xfrm>
-            <a:off x="504000" y="396000"/>
-            <a:ext cx="1800000" cy="720000"/>
+            <a:off x="1188000" y="1044000"/>
+            <a:ext cx="1800000" cy="432000"/>
           </a:xfrm>
           <a:prstGeom prst="rect">
             <a:avLst/>
@@ -3696,20 +3630,20 @@
           <a:noFill/>
         </p:spPr>
         <p:txBody>
-          <a:bodyPr wrap="square" lIns="0" rIns="0" tIns="0" bIns="0" anchor="ctr">
+          <a:bodyPr wrap="square" lIns="0" rIns="0" tIns="0" bIns="0" anchor="t">
             <a:spAutoFit/>
           </a:bodyPr>
           <a:lstStyle/>
           <a:p>
-            <a:pPr algn="l">
+            <a:pPr algn="r">
               <a:lnSpc>
-                <a:spcPts val="1667"/>
+                <a:spcPts val="1739"/>
               </a:lnSpc>
             </a:pPr>
             <a:r>
-              <a:rPr sz="1150" b="1">
+              <a:rPr sz="1200" b="1">
                 <a:solidFill>
-                  <a:srgbClr val="143D21"/>
+                  <a:srgbClr val="12151C"/>
                 </a:solidFill>
                 <a:latin typeface="맑은 고딕"/>
                 <a:ea typeface="맑은 고딕"/>
@@ -3721,14 +3655,14 @@
       </p:sp>
       <p:sp>
         <p:nvSpPr>
-          <p:cNvPr id="6" name="텍스트"/>
+          <p:cNvPr id="5" name="텍스트"/>
           <p:cNvSpPr txBox="1"/>
           <p:nvPr/>
         </p:nvSpPr>
         <p:spPr>
           <a:xfrm>
-            <a:off x="504000" y="1260000"/>
-            <a:ext cx="1728000" cy="108000"/>
+            <a:off x="1188000" y="1526400"/>
+            <a:ext cx="1800000" cy="123826"/>
           </a:xfrm>
           <a:prstGeom prst="rect">
             <a:avLst/>
@@ -3741,90 +3675,20 @@
           </a:bodyPr>
           <a:lstStyle/>
           <a:p>
-            <a:pPr algn="l">
+            <a:pPr algn="r">
               <a:lnSpc>
-                <a:spcPts val="1087"/>
+                <a:spcPts val="942"/>
               </a:lnSpc>
             </a:pPr>
             <a:r>
-              <a:rPr sz="750" b="1" spc="200">
+              <a:rPr sz="650" b="1" spc="200">
                 <a:solidFill>
-                  <a:srgbClr val="617B69"/>
+                  <a:srgbClr val="6B7280"/>
                 </a:solidFill>
                 <a:latin typeface="맑은 고딕"/>
                 <a:ea typeface="맑은 고딕"/>
               </a:rPr>
               <a:t>기관명 · 부서명</a:t>
-            </a:r>
-          </a:p>
-        </p:txBody>
-      </p:sp>
-      <p:sp>
-        <p:nvSpPr>
-          <p:cNvPr id="7" name="Rectangle 6"/>
-          <p:cNvSpPr/>
-          <p:nvPr/>
-        </p:nvSpPr>
-        <p:spPr>
-          <a:xfrm>
-            <a:off x="2520000" y="216000"/>
-            <a:ext cx="468000" cy="468000"/>
-          </a:xfrm>
-          <a:prstGeom prst="rect">
-            <a:avLst/>
-          </a:prstGeom>
-          <a:noFill/>
-          <a:ln w="9000">
-            <a:solidFill>
-              <a:srgbClr val="2B8245"/>
-            </a:solidFill>
-            <a:prstDash val="dash"/>
-          </a:ln>
-        </p:spPr>
-        <p:txBody>
-          <a:bodyPr rtlCol="0" anchor="ctr"/>
-          <a:lstStyle/>
-          <a:p>
-            <a:pPr algn="ctr"/>
-          </a:p>
-        </p:txBody>
-      </p:sp>
-      <p:sp>
-        <p:nvSpPr>
-          <p:cNvPr id="8" name="텍스트"/>
-          <p:cNvSpPr txBox="1"/>
-          <p:nvPr/>
-        </p:nvSpPr>
-        <p:spPr>
-          <a:xfrm>
-            <a:off x="2520000" y="216000"/>
-            <a:ext cx="468000" cy="468000"/>
-          </a:xfrm>
-          <a:prstGeom prst="rect">
-            <a:avLst/>
-          </a:prstGeom>
-          <a:noFill/>
-        </p:spPr>
-        <p:txBody>
-          <a:bodyPr wrap="square" lIns="0" rIns="0" tIns="0" bIns="0" anchor="ctr">
-            <a:spAutoFit/>
-          </a:bodyPr>
-          <a:lstStyle/>
-          <a:p>
-            <a:pPr algn="ctr">
-              <a:lnSpc>
-                <a:spcPts val="1305"/>
-              </a:lnSpc>
-            </a:pPr>
-            <a:r>
-              <a:rPr sz="900" b="1">
-                <a:solidFill>
-                  <a:srgbClr val="617B69"/>
-                </a:solidFill>
-                <a:latin typeface="맑은 고딕"/>
-                <a:ea typeface="맑은 고딕"/>
-              </a:rPr>
-              <a:t>QR</a:t>
             </a:r>
           </a:p>
         </p:txBody>

--- a/public/fun/cards/public/public-27.pptx
+++ b/public/fun/cards/public/public-27.pptx
@@ -3097,25 +3097,193 @@
         <p:nvPr/>
       </p:nvGrpSpPr>
       <p:grpSpPr/>
-      <p:sp>
-        <p:nvSpPr>
-          <p:cNvPr id="2" name="Oval 1"/>
+      <p:cxnSp>
+        <p:nvCxnSpPr>
+          <p:cNvPr id="2" name="Connector 1"/>
+          <p:cNvCxnSpPr/>
+          <p:nvPr/>
+        </p:nvCxnSpPr>
+        <p:spPr>
+          <a:xfrm>
+            <a:off x="93600" y="122400"/>
+            <a:ext cx="57600" cy="0"/>
+          </a:xfrm>
+          <a:prstGeom prst="line">
+            <a:avLst/>
+          </a:prstGeom>
+          <a:ln w="3600">
+            <a:solidFill>
+              <a:srgbClr val="FFF8B8"/>
+            </a:solidFill>
+          </a:ln>
+        </p:spPr>
+      </p:cxnSp>
+      <p:cxnSp>
+        <p:nvCxnSpPr>
+          <p:cNvPr id="3" name="Connector 2"/>
+          <p:cNvCxnSpPr/>
+          <p:nvPr/>
+        </p:nvCxnSpPr>
+        <p:spPr>
+          <a:xfrm>
+            <a:off x="122400" y="93600"/>
+            <a:ext cx="0" cy="57600"/>
+          </a:xfrm>
+          <a:prstGeom prst="line">
+            <a:avLst/>
+          </a:prstGeom>
+          <a:ln w="3600">
+            <a:solidFill>
+              <a:srgbClr val="FFF8B8"/>
+            </a:solidFill>
+          </a:ln>
+        </p:spPr>
+      </p:cxnSp>
+      <p:cxnSp>
+        <p:nvCxnSpPr>
+          <p:cNvPr id="4" name="Connector 3"/>
+          <p:cNvCxnSpPr/>
+          <p:nvPr/>
+        </p:nvCxnSpPr>
+        <p:spPr>
+          <a:xfrm>
+            <a:off x="3088800" y="122400"/>
+            <a:ext cx="57600" cy="0"/>
+          </a:xfrm>
+          <a:prstGeom prst="line">
+            <a:avLst/>
+          </a:prstGeom>
+          <a:ln w="3600">
+            <a:solidFill>
+              <a:srgbClr val="FFF8B8"/>
+            </a:solidFill>
+          </a:ln>
+        </p:spPr>
+      </p:cxnSp>
+      <p:cxnSp>
+        <p:nvCxnSpPr>
+          <p:cNvPr id="5" name="Connector 4"/>
+          <p:cNvCxnSpPr/>
+          <p:nvPr/>
+        </p:nvCxnSpPr>
+        <p:spPr>
+          <a:xfrm>
+            <a:off x="3117600" y="93600"/>
+            <a:ext cx="0" cy="57600"/>
+          </a:xfrm>
+          <a:prstGeom prst="line">
+            <a:avLst/>
+          </a:prstGeom>
+          <a:ln w="3600">
+            <a:solidFill>
+              <a:srgbClr val="FFF8B8"/>
+            </a:solidFill>
+          </a:ln>
+        </p:spPr>
+      </p:cxnSp>
+      <p:cxnSp>
+        <p:nvCxnSpPr>
+          <p:cNvPr id="6" name="Connector 5"/>
+          <p:cNvCxnSpPr/>
+          <p:nvPr/>
+        </p:nvCxnSpPr>
+        <p:spPr>
+          <a:xfrm>
+            <a:off x="93600" y="1677600"/>
+            <a:ext cx="57600" cy="0"/>
+          </a:xfrm>
+          <a:prstGeom prst="line">
+            <a:avLst/>
+          </a:prstGeom>
+          <a:ln w="3600">
+            <a:solidFill>
+              <a:srgbClr val="FFF8B8"/>
+            </a:solidFill>
+          </a:ln>
+        </p:spPr>
+      </p:cxnSp>
+      <p:cxnSp>
+        <p:nvCxnSpPr>
+          <p:cNvPr id="7" name="Connector 6"/>
+          <p:cNvCxnSpPr/>
+          <p:nvPr/>
+        </p:nvCxnSpPr>
+        <p:spPr>
+          <a:xfrm>
+            <a:off x="122400" y="1648800"/>
+            <a:ext cx="0" cy="57600"/>
+          </a:xfrm>
+          <a:prstGeom prst="line">
+            <a:avLst/>
+          </a:prstGeom>
+          <a:ln w="3600">
+            <a:solidFill>
+              <a:srgbClr val="FFF8B8"/>
+            </a:solidFill>
+          </a:ln>
+        </p:spPr>
+      </p:cxnSp>
+      <p:cxnSp>
+        <p:nvCxnSpPr>
+          <p:cNvPr id="8" name="Connector 7"/>
+          <p:cNvCxnSpPr/>
+          <p:nvPr/>
+        </p:nvCxnSpPr>
+        <p:spPr>
+          <a:xfrm>
+            <a:off x="3088800" y="1677600"/>
+            <a:ext cx="57600" cy="0"/>
+          </a:xfrm>
+          <a:prstGeom prst="line">
+            <a:avLst/>
+          </a:prstGeom>
+          <a:ln w="3600">
+            <a:solidFill>
+              <a:srgbClr val="FFF8B8"/>
+            </a:solidFill>
+          </a:ln>
+        </p:spPr>
+      </p:cxnSp>
+      <p:cxnSp>
+        <p:nvCxnSpPr>
+          <p:cNvPr id="9" name="Connector 8"/>
+          <p:cNvCxnSpPr/>
+          <p:nvPr/>
+        </p:nvCxnSpPr>
+        <p:spPr>
+          <a:xfrm>
+            <a:off x="3117600" y="1648800"/>
+            <a:ext cx="0" cy="57600"/>
+          </a:xfrm>
+          <a:prstGeom prst="line">
+            <a:avLst/>
+          </a:prstGeom>
+          <a:ln w="3600">
+            <a:solidFill>
+              <a:srgbClr val="FFF8B8"/>
+            </a:solidFill>
+          </a:ln>
+        </p:spPr>
+      </p:cxnSp>
+      <p:sp>
+        <p:nvSpPr>
+          <p:cNvPr id="10" name="Oval 9"/>
           <p:cNvSpPr/>
           <p:nvPr/>
         </p:nvSpPr>
         <p:spPr>
           <a:xfrm>
-            <a:off x="1591200" y="208800"/>
-            <a:ext cx="57600" cy="57600"/>
+            <a:off x="1526400" y="237600"/>
+            <a:ext cx="187200" cy="187200"/>
           </a:xfrm>
           <a:prstGeom prst="ellipse">
             <a:avLst/>
           </a:prstGeom>
-          <a:solidFill>
-            <a:srgbClr val="FFE600"/>
-          </a:solidFill>
-          <a:ln>
-            <a:noFill/>
+          <a:noFill/>
+          <a:ln w="5040">
+            <a:solidFill>
+              <a:srgbClr val="FFE600"/>
+            </a:solidFill>
           </a:ln>
         </p:spPr>
         <p:txBody>
@@ -3128,14 +3296,14 @@
       </p:sp>
       <p:sp>
         <p:nvSpPr>
-          <p:cNvPr id="3" name="텍스트"/>
+          <p:cNvPr id="11" name="텍스트"/>
           <p:cNvSpPr txBox="1"/>
           <p:nvPr/>
         </p:nvSpPr>
         <p:spPr>
           <a:xfrm>
-            <a:off x="360000" y="468000"/>
-            <a:ext cx="2520000" cy="360000"/>
+            <a:off x="1476000" y="237600"/>
+            <a:ext cx="288000" cy="187200"/>
           </a:xfrm>
           <a:prstGeom prst="rect">
             <a:avLst/>
@@ -3143,6 +3311,46 @@
           <a:noFill/>
         </p:spPr>
         <p:txBody>
+          <a:bodyPr wrap="square" lIns="0" rIns="0" tIns="0" bIns="0" anchor="ctr">
+            <a:spAutoFit/>
+          </a:bodyPr>
+          <a:lstStyle/>
+          <a:p>
+            <a:pPr algn="ctr">
+              <a:lnSpc>
+                <a:spcPts val="1305"/>
+              </a:lnSpc>
+            </a:pPr>
+            <a:r>
+              <a:rPr sz="900" b="1">
+                <a:solidFill>
+                  <a:srgbClr val="FFE600"/>
+                </a:solidFill>
+                <a:latin typeface="맑은 고딕"/>
+                <a:ea typeface="맑은 고딕"/>
+              </a:rPr>
+              <a:t>기</a:t>
+            </a:r>
+          </a:p>
+        </p:txBody>
+      </p:sp>
+      <p:sp>
+        <p:nvSpPr>
+          <p:cNvPr id="12" name="텍스트"/>
+          <p:cNvSpPr txBox="1"/>
+          <p:nvPr/>
+        </p:nvSpPr>
+        <p:spPr>
+          <a:xfrm>
+            <a:off x="360000" y="540000"/>
+            <a:ext cx="2520000" cy="237600"/>
+          </a:xfrm>
+          <a:prstGeom prst="rect">
+            <a:avLst/>
+          </a:prstGeom>
+          <a:noFill/>
+        </p:spPr>
+        <p:txBody>
           <a:bodyPr wrap="square" lIns="0" rIns="0" tIns="0" bIns="0" anchor="t">
             <a:spAutoFit/>
           </a:bodyPr>
@@ -3150,11 +3358,11 @@
           <a:p>
             <a:pPr algn="ctr">
               <a:lnSpc>
-                <a:spcPts val="3190"/>
+                <a:spcPts val="1957"/>
               </a:lnSpc>
             </a:pPr>
             <a:r>
-              <a:rPr sz="2200" b="1">
+              <a:rPr sz="1350" b="1" spc="120">
                 <a:solidFill>
                   <a:srgbClr val="12151C"/>
                 </a:solidFill>
@@ -3168,14 +3376,14 @@
       </p:sp>
       <p:sp>
         <p:nvSpPr>
-          <p:cNvPr id="4" name="텍스트"/>
+          <p:cNvPr id="13" name="텍스트"/>
           <p:cNvSpPr txBox="1"/>
           <p:nvPr/>
         </p:nvSpPr>
         <p:spPr>
           <a:xfrm>
-            <a:off x="360000" y="878400"/>
-            <a:ext cx="2520000" cy="171451"/>
+            <a:off x="360000" y="792000"/>
+            <a:ext cx="2520000" cy="133351"/>
           </a:xfrm>
           <a:prstGeom prst="rect">
             <a:avLst/>
@@ -3190,11 +3398,11 @@
           <a:p>
             <a:pPr algn="ctr">
               <a:lnSpc>
-                <a:spcPts val="1305"/>
+                <a:spcPts val="1015"/>
               </a:lnSpc>
             </a:pPr>
             <a:r>
-              <a:rPr sz="900" b="0">
+              <a:rPr sz="700" b="0" spc="60">
                 <a:solidFill>
                   <a:srgbClr val="6C6411"/>
                 </a:solidFill>
@@ -3206,45 +3414,37 @@
           </a:p>
         </p:txBody>
       </p:sp>
-      <p:sp>
-        <p:nvSpPr>
-          <p:cNvPr id="5" name="Rectangle 4"/>
-          <p:cNvSpPr/>
+      <p:cxnSp>
+        <p:nvCxnSpPr>
+          <p:cNvPr id="14" name="Connector 13"/>
+          <p:cNvCxnSpPr/>
           <p:nvPr/>
-        </p:nvSpPr>
-        <p:spPr>
-          <a:xfrm>
-            <a:off x="1530000" y="1137600"/>
-            <a:ext cx="180000" cy="14400"/>
-          </a:xfrm>
-          <a:prstGeom prst="rect">
+        </p:nvCxnSpPr>
+        <p:spPr>
+          <a:xfrm>
+            <a:off x="1440000" y="1015200"/>
+            <a:ext cx="360000" cy="0"/>
+          </a:xfrm>
+          <a:prstGeom prst="line">
             <a:avLst/>
           </a:prstGeom>
-          <a:solidFill>
-            <a:srgbClr val="FFE600"/>
-          </a:solidFill>
-          <a:ln>
-            <a:noFill/>
+          <a:ln w="7920">
+            <a:solidFill>
+              <a:srgbClr val="FFE600"/>
+            </a:solidFill>
           </a:ln>
         </p:spPr>
-        <p:txBody>
-          <a:bodyPr rtlCol="0" anchor="ctr"/>
-          <a:lstStyle/>
-          <a:p>
-            <a:pPr algn="ctr"/>
-          </a:p>
-        </p:txBody>
-      </p:sp>
-      <p:sp>
-        <p:nvSpPr>
-          <p:cNvPr id="6" name="텍스트"/>
+      </p:cxnSp>
+      <p:sp>
+        <p:nvSpPr>
+          <p:cNvPr id="15" name="텍스트"/>
           <p:cNvSpPr txBox="1"/>
           <p:nvPr/>
         </p:nvSpPr>
         <p:spPr>
           <a:xfrm>
-            <a:off x="360000" y="1267200"/>
-            <a:ext cx="2520000" cy="133351"/>
+            <a:off x="360000" y="1101600"/>
+            <a:ext cx="2520000" cy="123826"/>
           </a:xfrm>
           <a:prstGeom prst="rect">
             <a:avLst/>
@@ -3259,32 +3459,72 @@
           <a:p>
             <a:pPr algn="ctr">
               <a:lnSpc>
-                <a:spcPts val="1015"/>
+                <a:spcPts val="942"/>
               </a:lnSpc>
             </a:pPr>
             <a:r>
-              <a:rPr sz="700" b="0">
+              <a:rPr sz="650" b="1" spc="220">
+                <a:solidFill>
+                  <a:srgbClr val="6C6411"/>
+                </a:solidFill>
+                <a:latin typeface="맑은 고딕"/>
+                <a:ea typeface="맑은 고딕"/>
+              </a:rPr>
+              <a:t>기관명 · 부서명</a:t>
+            </a:r>
+          </a:p>
+        </p:txBody>
+      </p:sp>
+      <p:sp>
+        <p:nvSpPr>
+          <p:cNvPr id="16" name="텍스트"/>
+          <p:cNvSpPr txBox="1"/>
+          <p:nvPr/>
+        </p:nvSpPr>
+        <p:spPr>
+          <a:xfrm>
+            <a:off x="360000" y="1339200"/>
+            <a:ext cx="2520000" cy="123826"/>
+          </a:xfrm>
+          <a:prstGeom prst="rect">
+            <a:avLst/>
+          </a:prstGeom>
+          <a:noFill/>
+        </p:spPr>
+        <p:txBody>
+          <a:bodyPr wrap="square" lIns="0" rIns="0" tIns="0" bIns="0" anchor="t">
+            <a:spAutoFit/>
+          </a:bodyPr>
+          <a:lstStyle/>
+          <a:p>
+            <a:pPr algn="ctr">
+              <a:lnSpc>
+                <a:spcPts val="942"/>
+              </a:lnSpc>
+            </a:pPr>
+            <a:r>
+              <a:rPr sz="650" b="0">
                 <a:solidFill>
                   <a:srgbClr val="12151C"/>
                 </a:solidFill>
                 <a:latin typeface="맑은 고딕"/>
                 <a:ea typeface="맑은 고딕"/>
               </a:rPr>
-              <a:t>010-1234-5678      name@example.com</a:t>
-            </a:r>
-          </a:p>
-        </p:txBody>
-      </p:sp>
-      <p:sp>
-        <p:nvSpPr>
-          <p:cNvPr id="7" name="텍스트"/>
+              <a:t>010-1234-5678     |     name@example.com</a:t>
+            </a:r>
+          </a:p>
+        </p:txBody>
+      </p:sp>
+      <p:sp>
+        <p:nvSpPr>
+          <p:cNvPr id="17" name="텍스트"/>
           <p:cNvSpPr txBox="1"/>
           <p:nvPr/>
         </p:nvSpPr>
         <p:spPr>
           <a:xfrm>
-            <a:off x="360000" y="1425600"/>
-            <a:ext cx="2520000" cy="133351"/>
+            <a:off x="360000" y="1476000"/>
+            <a:ext cx="2520000" cy="123826"/>
           </a:xfrm>
           <a:prstGeom prst="rect">
             <a:avLst/>
@@ -3299,11 +3539,11 @@
           <a:p>
             <a:pPr algn="ctr">
               <a:lnSpc>
-                <a:spcPts val="1015"/>
+                <a:spcPts val="942"/>
               </a:lnSpc>
             </a:pPr>
             <a:r>
-              <a:rPr sz="700" b="0">
+              <a:rPr sz="650" b="0">
                 <a:solidFill>
                   <a:srgbClr val="6C6411"/>
                 </a:solidFill>
@@ -3311,46 +3551,6 @@
                 <a:ea typeface="맑은 고딕"/>
               </a:rPr>
               <a:t>주소를 입력해 주세요</a:t>
-            </a:r>
-          </a:p>
-        </p:txBody>
-      </p:sp>
-      <p:sp>
-        <p:nvSpPr>
-          <p:cNvPr id="8" name="텍스트"/>
-          <p:cNvSpPr txBox="1"/>
-          <p:nvPr/>
-        </p:nvSpPr>
-        <p:spPr>
-          <a:xfrm>
-            <a:off x="360000" y="1576800"/>
-            <a:ext cx="2520000" cy="104776"/>
-          </a:xfrm>
-          <a:prstGeom prst="rect">
-            <a:avLst/>
-          </a:prstGeom>
-          <a:noFill/>
-        </p:spPr>
-        <p:txBody>
-          <a:bodyPr wrap="square" lIns="0" rIns="0" tIns="0" bIns="0" anchor="t">
-            <a:spAutoFit/>
-          </a:bodyPr>
-          <a:lstStyle/>
-          <a:p>
-            <a:pPr algn="ctr">
-              <a:lnSpc>
-                <a:spcPts val="797"/>
-              </a:lnSpc>
-            </a:pPr>
-            <a:r>
-              <a:rPr sz="550" b="1" spc="300">
-                <a:solidFill>
-                  <a:srgbClr val="6C6411"/>
-                </a:solidFill>
-                <a:latin typeface="맑은 고딕"/>
-                <a:ea typeface="맑은 고딕"/>
-              </a:rPr>
-              <a:t>기관명 · 부서명</a:t>
             </a:r>
           </a:p>
         </p:txBody>
@@ -3381,248 +3581,184 @@
         <p:nvPr/>
       </p:nvGrpSpPr>
       <p:grpSpPr/>
-      <p:sp>
-        <p:nvSpPr>
-          <p:cNvPr id="2" name="Freeform 1"/>
-          <p:cNvSpPr/>
+      <p:cxnSp>
+        <p:nvCxnSpPr>
+          <p:cNvPr id="2" name="Connector 1"/>
+          <p:cNvCxnSpPr/>
           <p:nvPr/>
-        </p:nvSpPr>
-        <p:spPr>
-          <a:xfrm>
-            <a:off x="0" y="0"/>
-            <a:ext cx="1080000" cy="1080000"/>
-          </a:xfrm>
-          <a:custGeom>
+        </p:nvCxnSpPr>
+        <p:spPr>
+          <a:xfrm>
+            <a:off x="79200" y="108000"/>
+            <a:ext cx="57600" cy="0"/>
+          </a:xfrm>
+          <a:prstGeom prst="line">
             <a:avLst/>
-            <a:gdLst/>
-            <a:ahLst/>
-            <a:cxnLst/>
-            <a:rect l="l" t="t" r="r" b="b"/>
-            <a:pathLst>
-              <a:path w="1080000" h="1080000">
-                <a:moveTo>
-                  <a:pt x="0" y="0"/>
-                </a:moveTo>
-                <a:lnTo>
-                  <a:pt x="1080000" y="0"/>
-                </a:lnTo>
-                <a:lnTo>
-                  <a:pt x="1077688" y="70635"/>
-                </a:lnTo>
-                <a:lnTo>
-                  <a:pt x="1070760" y="140968"/>
-                </a:lnTo>
-                <a:lnTo>
-                  <a:pt x="1059248" y="210698"/>
-                </a:lnTo>
-                <a:lnTo>
-                  <a:pt x="1043200" y="279525"/>
-                </a:lnTo>
-                <a:lnTo>
-                  <a:pt x="1022685" y="347155"/>
-                </a:lnTo>
-                <a:lnTo>
-                  <a:pt x="997790" y="413298"/>
-                </a:lnTo>
-                <a:lnTo>
-                  <a:pt x="968623" y="477672"/>
-                </a:lnTo>
-                <a:lnTo>
-                  <a:pt x="935307" y="540000"/>
-                </a:lnTo>
-                <a:lnTo>
-                  <a:pt x="897987" y="600016"/>
-                </a:lnTo>
-                <a:lnTo>
-                  <a:pt x="856822" y="657462"/>
-                </a:lnTo>
-                <a:lnTo>
-                  <a:pt x="811987" y="712093"/>
-                </a:lnTo>
-                <a:lnTo>
-                  <a:pt x="763675" y="763675"/>
-                </a:lnTo>
-                <a:lnTo>
-                  <a:pt x="712093" y="811987"/>
-                </a:lnTo>
-                <a:lnTo>
-                  <a:pt x="657462" y="856822"/>
-                </a:lnTo>
-                <a:lnTo>
-                  <a:pt x="600016" y="897987"/>
-                </a:lnTo>
-                <a:lnTo>
-                  <a:pt x="540000" y="935307"/>
-                </a:lnTo>
-                <a:lnTo>
-                  <a:pt x="477672" y="968623"/>
-                </a:lnTo>
-                <a:lnTo>
-                  <a:pt x="413298" y="997790"/>
-                </a:lnTo>
-                <a:lnTo>
-                  <a:pt x="347155" y="1022685"/>
-                </a:lnTo>
-                <a:lnTo>
-                  <a:pt x="279525" y="1043200"/>
-                </a:lnTo>
-                <a:lnTo>
-                  <a:pt x="210698" y="1059248"/>
-                </a:lnTo>
-                <a:lnTo>
-                  <a:pt x="140968" y="1070760"/>
-                </a:lnTo>
-                <a:lnTo>
-                  <a:pt x="70635" y="1077688"/>
-                </a:lnTo>
-                <a:lnTo>
-                  <a:pt x="0" y="1080000"/>
-                </a:lnTo>
-                <a:close/>
-              </a:path>
-            </a:pathLst>
-          </a:custGeom>
-          <a:solidFill>
-            <a:srgbClr val="FFE600"/>
-          </a:solidFill>
-          <a:ln>
-            <a:noFill/>
+          </a:prstGeom>
+          <a:ln w="3600">
+            <a:solidFill>
+              <a:srgbClr val="DCDFE4"/>
+            </a:solidFill>
           </a:ln>
         </p:spPr>
-        <p:txBody>
-          <a:bodyPr rtlCol="0" anchor="ctr"/>
-          <a:lstStyle/>
-          <a:p>
-            <a:pPr algn="ctr"/>
-          </a:p>
-        </p:txBody>
-      </p:sp>
-      <p:sp>
-        <p:nvSpPr>
-          <p:cNvPr id="3" name="Freeform 2"/>
-          <p:cNvSpPr/>
+      </p:cxnSp>
+      <p:cxnSp>
+        <p:nvCxnSpPr>
+          <p:cNvPr id="3" name="Connector 2"/>
+          <p:cNvCxnSpPr/>
           <p:nvPr/>
-        </p:nvSpPr>
-        <p:spPr>
-          <a:xfrm>
-            <a:off x="0" y="0"/>
-            <a:ext cx="684000" cy="684000"/>
-          </a:xfrm>
-          <a:custGeom>
+        </p:nvCxnSpPr>
+        <p:spPr>
+          <a:xfrm>
+            <a:off x="108000" y="79200"/>
+            <a:ext cx="0" cy="57600"/>
+          </a:xfrm>
+          <a:prstGeom prst="line">
             <a:avLst/>
-            <a:gdLst/>
-            <a:ahLst/>
-            <a:cxnLst/>
-            <a:rect l="l" t="t" r="r" b="b"/>
-            <a:pathLst>
-              <a:path w="684000" h="684000">
-                <a:moveTo>
-                  <a:pt x="0" y="0"/>
-                </a:moveTo>
-                <a:lnTo>
-                  <a:pt x="684000" y="0"/>
-                </a:lnTo>
-                <a:lnTo>
-                  <a:pt x="682536" y="44736"/>
-                </a:lnTo>
-                <a:lnTo>
-                  <a:pt x="678148" y="89280"/>
-                </a:lnTo>
-                <a:lnTo>
-                  <a:pt x="670857" y="133442"/>
-                </a:lnTo>
-                <a:lnTo>
-                  <a:pt x="660693" y="177032"/>
-                </a:lnTo>
-                <a:lnTo>
-                  <a:pt x="647700" y="219865"/>
-                </a:lnTo>
-                <a:lnTo>
-                  <a:pt x="631934" y="261755"/>
-                </a:lnTo>
-                <a:lnTo>
-                  <a:pt x="613461" y="302525"/>
-                </a:lnTo>
-                <a:lnTo>
-                  <a:pt x="592361" y="342000"/>
-                </a:lnTo>
-                <a:lnTo>
-                  <a:pt x="568725" y="380010"/>
-                </a:lnTo>
-                <a:lnTo>
-                  <a:pt x="542654" y="416393"/>
-                </a:lnTo>
-                <a:lnTo>
-                  <a:pt x="514258" y="450993"/>
-                </a:lnTo>
-                <a:lnTo>
-                  <a:pt x="483661" y="483661"/>
-                </a:lnTo>
-                <a:lnTo>
-                  <a:pt x="450993" y="514258"/>
-                </a:lnTo>
-                <a:lnTo>
-                  <a:pt x="416393" y="542654"/>
-                </a:lnTo>
-                <a:lnTo>
-                  <a:pt x="380010" y="568725"/>
-                </a:lnTo>
-                <a:lnTo>
-                  <a:pt x="342000" y="592361"/>
-                </a:lnTo>
-                <a:lnTo>
-                  <a:pt x="302525" y="613461"/>
-                </a:lnTo>
-                <a:lnTo>
-                  <a:pt x="261755" y="631934"/>
-                </a:lnTo>
-                <a:lnTo>
-                  <a:pt x="219865" y="647700"/>
-                </a:lnTo>
-                <a:lnTo>
-                  <a:pt x="177032" y="660693"/>
-                </a:lnTo>
-                <a:lnTo>
-                  <a:pt x="133442" y="670857"/>
-                </a:lnTo>
-                <a:lnTo>
-                  <a:pt x="89280" y="678148"/>
-                </a:lnTo>
-                <a:lnTo>
-                  <a:pt x="44736" y="682536"/>
-                </a:lnTo>
-                <a:lnTo>
-                  <a:pt x="0" y="684000"/>
-                </a:lnTo>
-                <a:close/>
-              </a:path>
-            </a:pathLst>
-          </a:custGeom>
-          <a:solidFill>
-            <a:srgbClr val="F5F2D4"/>
-          </a:solidFill>
-          <a:ln>
-            <a:noFill/>
+          </a:prstGeom>
+          <a:ln w="3600">
+            <a:solidFill>
+              <a:srgbClr val="DCDFE4"/>
+            </a:solidFill>
           </a:ln>
         </p:spPr>
-        <p:txBody>
-          <a:bodyPr rtlCol="0" anchor="ctr"/>
-          <a:lstStyle/>
-          <a:p>
-            <a:pPr algn="ctr"/>
-          </a:p>
-        </p:txBody>
-      </p:sp>
-      <p:sp>
-        <p:nvSpPr>
-          <p:cNvPr id="4" name="텍스트"/>
+      </p:cxnSp>
+      <p:cxnSp>
+        <p:nvCxnSpPr>
+          <p:cNvPr id="4" name="Connector 3"/>
+          <p:cNvCxnSpPr/>
+          <p:nvPr/>
+        </p:nvCxnSpPr>
+        <p:spPr>
+          <a:xfrm>
+            <a:off x="3103200" y="108000"/>
+            <a:ext cx="57600" cy="0"/>
+          </a:xfrm>
+          <a:prstGeom prst="line">
+            <a:avLst/>
+          </a:prstGeom>
+          <a:ln w="3600">
+            <a:solidFill>
+              <a:srgbClr val="DCDFE4"/>
+            </a:solidFill>
+          </a:ln>
+        </p:spPr>
+      </p:cxnSp>
+      <p:cxnSp>
+        <p:nvCxnSpPr>
+          <p:cNvPr id="5" name="Connector 4"/>
+          <p:cNvCxnSpPr/>
+          <p:nvPr/>
+        </p:nvCxnSpPr>
+        <p:spPr>
+          <a:xfrm>
+            <a:off x="3132000" y="79200"/>
+            <a:ext cx="0" cy="57600"/>
+          </a:xfrm>
+          <a:prstGeom prst="line">
+            <a:avLst/>
+          </a:prstGeom>
+          <a:ln w="3600">
+            <a:solidFill>
+              <a:srgbClr val="DCDFE4"/>
+            </a:solidFill>
+          </a:ln>
+        </p:spPr>
+      </p:cxnSp>
+      <p:cxnSp>
+        <p:nvCxnSpPr>
+          <p:cNvPr id="6" name="Connector 5"/>
+          <p:cNvCxnSpPr/>
+          <p:nvPr/>
+        </p:nvCxnSpPr>
+        <p:spPr>
+          <a:xfrm>
+            <a:off x="79200" y="1692000"/>
+            <a:ext cx="57600" cy="0"/>
+          </a:xfrm>
+          <a:prstGeom prst="line">
+            <a:avLst/>
+          </a:prstGeom>
+          <a:ln w="3600">
+            <a:solidFill>
+              <a:srgbClr val="DCDFE4"/>
+            </a:solidFill>
+          </a:ln>
+        </p:spPr>
+      </p:cxnSp>
+      <p:cxnSp>
+        <p:nvCxnSpPr>
+          <p:cNvPr id="7" name="Connector 6"/>
+          <p:cNvCxnSpPr/>
+          <p:nvPr/>
+        </p:nvCxnSpPr>
+        <p:spPr>
+          <a:xfrm>
+            <a:off x="108000" y="1663200"/>
+            <a:ext cx="0" cy="57600"/>
+          </a:xfrm>
+          <a:prstGeom prst="line">
+            <a:avLst/>
+          </a:prstGeom>
+          <a:ln w="3600">
+            <a:solidFill>
+              <a:srgbClr val="DCDFE4"/>
+            </a:solidFill>
+          </a:ln>
+        </p:spPr>
+      </p:cxnSp>
+      <p:cxnSp>
+        <p:nvCxnSpPr>
+          <p:cNvPr id="8" name="Connector 7"/>
+          <p:cNvCxnSpPr/>
+          <p:nvPr/>
+        </p:nvCxnSpPr>
+        <p:spPr>
+          <a:xfrm>
+            <a:off x="3103200" y="1692000"/>
+            <a:ext cx="57600" cy="0"/>
+          </a:xfrm>
+          <a:prstGeom prst="line">
+            <a:avLst/>
+          </a:prstGeom>
+          <a:ln w="3600">
+            <a:solidFill>
+              <a:srgbClr val="DCDFE4"/>
+            </a:solidFill>
+          </a:ln>
+        </p:spPr>
+      </p:cxnSp>
+      <p:cxnSp>
+        <p:nvCxnSpPr>
+          <p:cNvPr id="9" name="Connector 8"/>
+          <p:cNvCxnSpPr/>
+          <p:nvPr/>
+        </p:nvCxnSpPr>
+        <p:spPr>
+          <a:xfrm>
+            <a:off x="3132000" y="1663200"/>
+            <a:ext cx="0" cy="57600"/>
+          </a:xfrm>
+          <a:prstGeom prst="line">
+            <a:avLst/>
+          </a:prstGeom>
+          <a:ln w="3600">
+            <a:solidFill>
+              <a:srgbClr val="DCDFE4"/>
+            </a:solidFill>
+          </a:ln>
+        </p:spPr>
+      </p:cxnSp>
+      <p:sp>
+        <p:nvSpPr>
+          <p:cNvPr id="10" name="텍스트"/>
           <p:cNvSpPr txBox="1"/>
           <p:nvPr/>
         </p:nvSpPr>
         <p:spPr>
           <a:xfrm>
-            <a:off x="1188000" y="1044000"/>
-            <a:ext cx="1800000" cy="432000"/>
+            <a:off x="252000" y="288000"/>
+            <a:ext cx="2520000" cy="123826"/>
           </a:xfrm>
           <a:prstGeom prst="rect">
             <a:avLst/>
@@ -3635,53 +3771,13 @@
           </a:bodyPr>
           <a:lstStyle/>
           <a:p>
-            <a:pPr algn="r">
-              <a:lnSpc>
-                <a:spcPts val="1739"/>
-              </a:lnSpc>
-            </a:pPr>
-            <a:r>
-              <a:rPr sz="1200" b="1">
-                <a:solidFill>
-                  <a:srgbClr val="12151C"/>
-                </a:solidFill>
-                <a:latin typeface="맑은 고딕"/>
-                <a:ea typeface="맑은 고딕"/>
-              </a:rPr>
-              <a:t>투명한 절차, 따뜻한 마음</a:t>
-            </a:r>
-          </a:p>
-        </p:txBody>
-      </p:sp>
-      <p:sp>
-        <p:nvSpPr>
-          <p:cNvPr id="5" name="텍스트"/>
-          <p:cNvSpPr txBox="1"/>
-          <p:nvPr/>
-        </p:nvSpPr>
-        <p:spPr>
-          <a:xfrm>
-            <a:off x="1188000" y="1526400"/>
-            <a:ext cx="1800000" cy="123826"/>
-          </a:xfrm>
-          <a:prstGeom prst="rect">
-            <a:avLst/>
-          </a:prstGeom>
-          <a:noFill/>
-        </p:spPr>
-        <p:txBody>
-          <a:bodyPr wrap="square" lIns="0" rIns="0" tIns="0" bIns="0" anchor="t">
-            <a:spAutoFit/>
-          </a:bodyPr>
-          <a:lstStyle/>
-          <a:p>
-            <a:pPr algn="r">
+            <a:pPr algn="ctr">
               <a:lnSpc>
                 <a:spcPts val="942"/>
               </a:lnSpc>
             </a:pPr>
             <a:r>
-              <a:rPr sz="650" b="1" spc="200">
+              <a:rPr sz="650" b="1" spc="220">
                 <a:solidFill>
                   <a:srgbClr val="6B7280"/>
                 </a:solidFill>
@@ -3689,6 +3785,237 @@
                 <a:ea typeface="맑은 고딕"/>
               </a:rPr>
               <a:t>기관명 · 부서명</a:t>
+            </a:r>
+          </a:p>
+        </p:txBody>
+      </p:sp>
+      <p:sp>
+        <p:nvSpPr>
+          <p:cNvPr id="11" name="Rectangle 10"/>
+          <p:cNvSpPr/>
+          <p:nvPr/>
+        </p:nvSpPr>
+        <p:spPr>
+          <a:xfrm>
+            <a:off x="1530000" y="453600"/>
+            <a:ext cx="180000" cy="14400"/>
+          </a:xfrm>
+          <a:prstGeom prst="rect">
+            <a:avLst/>
+          </a:prstGeom>
+          <a:solidFill>
+            <a:srgbClr val="FFE600"/>
+          </a:solidFill>
+          <a:ln>
+            <a:noFill/>
+          </a:ln>
+        </p:spPr>
+        <p:txBody>
+          <a:bodyPr rtlCol="0" anchor="ctr"/>
+          <a:lstStyle/>
+          <a:p>
+            <a:pPr algn="ctr"/>
+          </a:p>
+        </p:txBody>
+      </p:sp>
+      <p:sp>
+        <p:nvSpPr>
+          <p:cNvPr id="12" name="텍스트"/>
+          <p:cNvSpPr txBox="1"/>
+          <p:nvPr/>
+        </p:nvSpPr>
+        <p:spPr>
+          <a:xfrm>
+            <a:off x="360000" y="619200"/>
+            <a:ext cx="2520000" cy="99061"/>
+          </a:xfrm>
+          <a:prstGeom prst="rect">
+            <a:avLst/>
+          </a:prstGeom>
+          <a:noFill/>
+        </p:spPr>
+        <p:txBody>
+          <a:bodyPr wrap="square" lIns="0" rIns="0" tIns="0" bIns="0" anchor="t">
+            <a:spAutoFit/>
+          </a:bodyPr>
+          <a:lstStyle/>
+          <a:p>
+            <a:pPr algn="ctr">
+              <a:lnSpc>
+                <a:spcPts val="754"/>
+              </a:lnSpc>
+            </a:pPr>
+            <a:r>
+              <a:rPr sz="520" b="1" spc="240">
+                <a:solidFill>
+                  <a:srgbClr val="6B7280"/>
+                </a:solidFill>
+                <a:latin typeface="맑은 고딕"/>
+                <a:ea typeface="맑은 고딕"/>
+              </a:rPr>
+              <a:t>담당 업무</a:t>
+            </a:r>
+          </a:p>
+        </p:txBody>
+      </p:sp>
+      <p:sp>
+        <p:nvSpPr>
+          <p:cNvPr id="13" name="텍스트"/>
+          <p:cNvSpPr txBox="1"/>
+          <p:nvPr/>
+        </p:nvSpPr>
+        <p:spPr>
+          <a:xfrm>
+            <a:off x="360000" y="741600"/>
+            <a:ext cx="2520000" cy="396000"/>
+          </a:xfrm>
+          <a:prstGeom prst="rect">
+            <a:avLst/>
+          </a:prstGeom>
+          <a:noFill/>
+        </p:spPr>
+        <p:txBody>
+          <a:bodyPr wrap="square" lIns="0" rIns="0" tIns="0" bIns="0" anchor="t">
+            <a:spAutoFit/>
+          </a:bodyPr>
+          <a:lstStyle/>
+          <a:p>
+            <a:pPr algn="ctr">
+              <a:lnSpc>
+                <a:spcPts val="1188"/>
+              </a:lnSpc>
+            </a:pPr>
+            <a:r>
+              <a:rPr sz="819" b="1">
+                <a:solidFill>
+                  <a:srgbClr val="12151C"/>
+                </a:solidFill>
+                <a:latin typeface="맑은 고딕"/>
+                <a:ea typeface="맑은 고딕"/>
+              </a:rPr>
+              <a:t>주민 서비스  ·  지역 사업  ·  안전 관리  ·  세무 안내</a:t>
+            </a:r>
+          </a:p>
+        </p:txBody>
+      </p:sp>
+      <p:cxnSp>
+        <p:nvCxnSpPr>
+          <p:cNvPr id="14" name="Connector 13"/>
+          <p:cNvCxnSpPr/>
+          <p:nvPr/>
+        </p:nvCxnSpPr>
+        <p:spPr>
+          <a:xfrm>
+            <a:off x="360000" y="1224000"/>
+            <a:ext cx="2520000" cy="0"/>
+          </a:xfrm>
+          <a:prstGeom prst="line">
+            <a:avLst/>
+          </a:prstGeom>
+          <a:ln w="3600">
+            <a:solidFill>
+              <a:srgbClr val="DCDFE4"/>
+            </a:solidFill>
+          </a:ln>
+        </p:spPr>
+      </p:cxnSp>
+      <p:sp>
+        <p:nvSpPr>
+          <p:cNvPr id="15" name="텍스트"/>
+          <p:cNvSpPr txBox="1"/>
+          <p:nvPr/>
+        </p:nvSpPr>
+        <p:spPr>
+          <a:xfrm>
+            <a:off x="360000" y="1317600"/>
+            <a:ext cx="1224000" cy="118111"/>
+          </a:xfrm>
+          <a:prstGeom prst="rect">
+            <a:avLst/>
+          </a:prstGeom>
+          <a:noFill/>
+        </p:spPr>
+        <p:txBody>
+          <a:bodyPr wrap="square" lIns="0" rIns="0" tIns="0" bIns="0" anchor="t">
+            <a:spAutoFit/>
+          </a:bodyPr>
+          <a:lstStyle/>
+          <a:p>
+            <a:pPr algn="ctr">
+              <a:lnSpc>
+                <a:spcPts val="899"/>
+              </a:lnSpc>
+            </a:pPr>
+            <a:r>
+              <a:rPr sz="620" b="0">
+                <a:solidFill>
+                  <a:srgbClr val="12151C"/>
+                </a:solidFill>
+                <a:latin typeface="맑은 고딕"/>
+                <a:ea typeface="맑은 고딕"/>
+              </a:rPr>
+              <a:t>점심시간 12:00 – 13:00</a:t>
+            </a:r>
+          </a:p>
+        </p:txBody>
+      </p:sp>
+      <p:cxnSp>
+        <p:nvCxnSpPr>
+          <p:cNvPr id="16" name="Connector 15"/>
+          <p:cNvCxnSpPr/>
+          <p:nvPr/>
+        </p:nvCxnSpPr>
+        <p:spPr>
+          <a:xfrm>
+            <a:off x="1620000" y="1296000"/>
+            <a:ext cx="0" cy="180000"/>
+          </a:xfrm>
+          <a:prstGeom prst="line">
+            <a:avLst/>
+          </a:prstGeom>
+          <a:ln w="3600">
+            <a:solidFill>
+              <a:srgbClr val="DCDFE4"/>
+            </a:solidFill>
+          </a:ln>
+        </p:spPr>
+      </p:cxnSp>
+      <p:sp>
+        <p:nvSpPr>
+          <p:cNvPr id="17" name="텍스트"/>
+          <p:cNvSpPr txBox="1"/>
+          <p:nvPr/>
+        </p:nvSpPr>
+        <p:spPr>
+          <a:xfrm>
+            <a:off x="1656000" y="1317600"/>
+            <a:ext cx="1224000" cy="118111"/>
+          </a:xfrm>
+          <a:prstGeom prst="rect">
+            <a:avLst/>
+          </a:prstGeom>
+          <a:noFill/>
+        </p:spPr>
+        <p:txBody>
+          <a:bodyPr wrap="square" lIns="0" rIns="0" tIns="0" bIns="0" anchor="t">
+            <a:spAutoFit/>
+          </a:bodyPr>
+          <a:lstStyle/>
+          <a:p>
+            <a:pPr algn="ctr">
+              <a:lnSpc>
+                <a:spcPts val="899"/>
+              </a:lnSpc>
+            </a:pPr>
+            <a:r>
+              <a:rPr sz="620" b="0">
+                <a:solidFill>
+                  <a:srgbClr val="12151C"/>
+                </a:solidFill>
+                <a:latin typeface="맑은 고딕"/>
+                <a:ea typeface="맑은 고딕"/>
+              </a:rPr>
+              <a:t>www.example.com</a:t>
             </a:r>
           </a:p>
         </p:txBody>
